--- a/deliverables/Policy_Evidence_Interface_Project_Update.pptx
+++ b/deliverables/Policy_Evidence_Interface_Project_Update.pptx
@@ -7202,7 +7202,7 @@
       </p:sp>
       <p:sp>
         <p:nvSpPr>
-          <p:cNvPr id="42" name="Text: EXTEND"/>
+          <p:cNvPr id="42" name="Text: MODULAR"/>
           <p:cNvSpPr txBox="1"/>
           <p:nvPr/>
         </p:nvSpPr>
@@ -7235,14 +7235,14 @@
             </a:pPr>
             <a:r>
               <a:rPr dirty="0"/>
-              <a:t>EXTEND</a:t>
-            </a:r>
-          </a:p>
-        </p:txBody>
-      </p:sp>
-      <p:sp>
-        <p:nvSpPr>
-          <p:cNvPr id="43" name="Text: annotation plugins"/>
+              <a:t>MODULAR</a:t>
+            </a:r>
+          </a:p>
+        </p:txBody>
+      </p:sp>
+      <p:sp>
+        <p:nvSpPr>
+          <p:cNvPr id="43" name="Text: plugin-based design"/>
           <p:cNvSpPr txBox="1"/>
           <p:nvPr/>
         </p:nvSpPr>
@@ -7275,7 +7275,7 @@
             </a:pPr>
             <a:r>
               <a:rPr dirty="0"/>
-              <a:t>annotation plugins</a:t>
+              <a:t>plugin-based design</a:t>
             </a:r>
           </a:p>
         </p:txBody>
@@ -7288,8 +7288,8 @@
         </p:nvSpPr>
         <p:spPr>
           <a:xfrm>
-            <a:off x="9364980" y="4260335"/>
-            <a:ext cx="2057400" cy="984885"/>
+            <a:off x="9364980" y="4383445"/>
+            <a:ext cx="2186940" cy="738664"/>
           </a:xfrm>
           <a:prstGeom prst="rect">
             <a:avLst/>
@@ -7315,7 +7315,15 @@
             </a:pPr>
             <a:r>
               <a:rPr sz="1600" dirty="0"/>
-              <a:t>New functions are discovered through Drupal’s plugin system.</a:t>
+              <a:t>New tools </a:t>
+            </a:r>
+            <a:r>
+              <a:rPr lang="en-US" sz="1600" dirty="0"/>
+              <a:t>&amp; </a:t>
+            </a:r>
+            <a:r>
+              <a:rPr sz="1600" dirty="0"/>
+              <a:t>resources can be added without changing server core.</a:t>
             </a:r>
           </a:p>
         </p:txBody>
